--- a/tissue-capacity-model/deliverables/Tissue_Capacity_2026_2027_update063026.pptx
+++ b/tissue-capacity-model/deliverables/Tissue_Capacity_2026_2027_update063026.pptx
@@ -678,946 +678,6 @@
   <c:externalData r:id="rId1">
     <c:autoUpdate val="0"/>
   </c:externalData>
-</c:chartSpace>
-</file>
-
-<file path=ppt/charts/chart2.xml><?xml version="1.0" encoding="utf-8"?>
-<c:chartSpace xmlns:c="http://schemas.openxmlformats.org/drawingml/2006/chart" xmlns:a="http://schemas.openxmlformats.org/drawingml/2006/main" xmlns:r="http://schemas.openxmlformats.org/officeDocument/2006/relationships">
-  <c:date1904 val="0"/>
-  <c:chart>
-    <c:autoTitleDeleted val="1"/>
-    <c:plotArea>
-      <c:lineChart>
-        <c:grouping val="standard"/>
-        <c:varyColors val="0"/>
-        <c:ser>
-          <c:idx val="0"/>
-          <c:order val="0"/>
-          <c:tx>
-            <c:strRef>
-              <c:f>Sheet1!$B$1</c:f>
-              <c:strCache>
-                <c:ptCount val="1"/>
-                <c:pt idx="0">
-                  <c:v>Female Pelvic 541</c:v>
-                </c:pt>
-              </c:strCache>
-            </c:strRef>
-          </c:tx>
-          <c:spPr>
-            <a:ln w="25400">
-              <a:solidFill>
-                <a:srgbClr val="12345B"/>
-              </a:solidFill>
-            </a:ln>
-          </c:spPr>
-          <c:marker>
-            <c:symbol val="none"/>
-          </c:marker>
-          <c:cat>
-            <c:strRef>
-              <c:f>Sheet1!$A$2:$A$26</c:f>
-              <c:strCache>
-                <c:ptCount val="25"/>
-                <c:pt idx="0">
-                  <c:v>12/29</c:v>
-                </c:pt>
-                <c:pt idx="1">
-                  <c:v>01/05</c:v>
-                </c:pt>
-                <c:pt idx="2">
-                  <c:v>01/12</c:v>
-                </c:pt>
-                <c:pt idx="3">
-                  <c:v>01/19</c:v>
-                </c:pt>
-                <c:pt idx="4">
-                  <c:v>01/26</c:v>
-                </c:pt>
-                <c:pt idx="5">
-                  <c:v>02/02</c:v>
-                </c:pt>
-                <c:pt idx="6">
-                  <c:v>02/09</c:v>
-                </c:pt>
-                <c:pt idx="7">
-                  <c:v>02/16</c:v>
-                </c:pt>
-                <c:pt idx="8">
-                  <c:v>02/23</c:v>
-                </c:pt>
-                <c:pt idx="9">
-                  <c:v>03/02</c:v>
-                </c:pt>
-                <c:pt idx="10">
-                  <c:v>03/09</c:v>
-                </c:pt>
-                <c:pt idx="11">
-                  <c:v>03/16</c:v>
-                </c:pt>
-                <c:pt idx="12">
-                  <c:v>03/23</c:v>
-                </c:pt>
-                <c:pt idx="13">
-                  <c:v>03/30</c:v>
-                </c:pt>
-                <c:pt idx="14">
-                  <c:v>04/06</c:v>
-                </c:pt>
-                <c:pt idx="15">
-                  <c:v>04/13</c:v>
-                </c:pt>
-                <c:pt idx="16">
-                  <c:v>04/20</c:v>
-                </c:pt>
-                <c:pt idx="17">
-                  <c:v>04/27</c:v>
-                </c:pt>
-                <c:pt idx="18">
-                  <c:v>05/04</c:v>
-                </c:pt>
-                <c:pt idx="19">
-                  <c:v>05/11</c:v>
-                </c:pt>
-                <c:pt idx="20">
-                  <c:v>05/18</c:v>
-                </c:pt>
-                <c:pt idx="21">
-                  <c:v>05/25</c:v>
-                </c:pt>
-                <c:pt idx="22">
-                  <c:v>06/01</c:v>
-                </c:pt>
-                <c:pt idx="23">
-                  <c:v>06/08</c:v>
-                </c:pt>
-                <c:pt idx="24">
-                  <c:v>06/15</c:v>
-                </c:pt>
-              </c:strCache>
-            </c:strRef>
-          </c:cat>
-          <c:val>
-            <c:numRef>
-              <c:f>Sheet1!$B$2:$B$26</c:f>
-              <c:numCache>
-                <c:formatCode>General</c:formatCode>
-                <c:ptCount val="25"/>
-                <c:pt idx="0">
-                  <c:v>102.9</c:v>
-                </c:pt>
-                <c:pt idx="1">
-                  <c:v>38.2</c:v>
-                </c:pt>
-                <c:pt idx="2">
-                  <c:v>92.9</c:v>
-                </c:pt>
-                <c:pt idx="3">
-                  <c:v>71.2</c:v>
-                </c:pt>
-                <c:pt idx="4">
-                  <c:v>91.8</c:v>
-                </c:pt>
-                <c:pt idx="5">
-                  <c:v>61.2</c:v>
-                </c:pt>
-                <c:pt idx="6">
-                  <c:v>55.9</c:v>
-                </c:pt>
-                <c:pt idx="7">
-                  <c:v>101.8</c:v>
-                </c:pt>
-                <c:pt idx="8">
-                  <c:v>141.2</c:v>
-                </c:pt>
-                <c:pt idx="9">
-                  <c:v>114.7</c:v>
-                </c:pt>
-                <c:pt idx="10">
-                  <c:v>147.6</c:v>
-                </c:pt>
-                <c:pt idx="11">
-                  <c:v>189.4</c:v>
-                </c:pt>
-                <c:pt idx="12">
-                  <c:v>87.6</c:v>
-                </c:pt>
-                <c:pt idx="13">
-                  <c:v>93.5</c:v>
-                </c:pt>
-                <c:pt idx="14">
-                  <c:v>128.8</c:v>
-                </c:pt>
-                <c:pt idx="15">
-                  <c:v>190.0</c:v>
-                </c:pt>
-                <c:pt idx="16">
-                  <c:v>141.2</c:v>
-                </c:pt>
-                <c:pt idx="17">
-                  <c:v>110.6</c:v>
-                </c:pt>
-                <c:pt idx="18">
-                  <c:v>108.2</c:v>
-                </c:pt>
-                <c:pt idx="19">
-                  <c:v>95.9</c:v>
-                </c:pt>
-                <c:pt idx="20">
-                  <c:v>118.8</c:v>
-                </c:pt>
-                <c:pt idx="21">
-                  <c:v>112.4</c:v>
-                </c:pt>
-                <c:pt idx="22">
-                  <c:v>83.5</c:v>
-                </c:pt>
-                <c:pt idx="23">
-                  <c:v>61.8</c:v>
-                </c:pt>
-                <c:pt idx="24">
-                  <c:v>64.7</c:v>
-                </c:pt>
-              </c:numCache>
-            </c:numRef>
-          </c:val>
-          <c:smooth val="0"/>
-        </c:ser>
-        <c:ser>
-          <c:idx val="1"/>
-          <c:order val="1"/>
-          <c:tx>
-            <c:strRef>
-              <c:f>Sheet1!$C$1</c:f>
-              <c:strCache>
-                <c:ptCount val="1"/>
-                <c:pt idx="0">
-                  <c:v>Ask (100%)</c:v>
-                </c:pt>
-              </c:strCache>
-            </c:strRef>
-          </c:tx>
-          <c:spPr>
-            <a:ln w="15875">
-              <a:solidFill>
-                <a:srgbClr val="9AA7B4"/>
-              </a:solidFill>
-              <a:prstDash val="dash"/>
-            </a:ln>
-          </c:spPr>
-          <c:marker>
-            <c:symbol val="none"/>
-          </c:marker>
-          <c:cat>
-            <c:strRef>
-              <c:f>Sheet1!$A$2:$A$26</c:f>
-              <c:strCache>
-                <c:ptCount val="25"/>
-                <c:pt idx="0">
-                  <c:v>12/29</c:v>
-                </c:pt>
-                <c:pt idx="1">
-                  <c:v>01/05</c:v>
-                </c:pt>
-                <c:pt idx="2">
-                  <c:v>01/12</c:v>
-                </c:pt>
-                <c:pt idx="3">
-                  <c:v>01/19</c:v>
-                </c:pt>
-                <c:pt idx="4">
-                  <c:v>01/26</c:v>
-                </c:pt>
-                <c:pt idx="5">
-                  <c:v>02/02</c:v>
-                </c:pt>
-                <c:pt idx="6">
-                  <c:v>02/09</c:v>
-                </c:pt>
-                <c:pt idx="7">
-                  <c:v>02/16</c:v>
-                </c:pt>
-                <c:pt idx="8">
-                  <c:v>02/23</c:v>
-                </c:pt>
-                <c:pt idx="9">
-                  <c:v>03/02</c:v>
-                </c:pt>
-                <c:pt idx="10">
-                  <c:v>03/09</c:v>
-                </c:pt>
-                <c:pt idx="11">
-                  <c:v>03/16</c:v>
-                </c:pt>
-                <c:pt idx="12">
-                  <c:v>03/23</c:v>
-                </c:pt>
-                <c:pt idx="13">
-                  <c:v>03/30</c:v>
-                </c:pt>
-                <c:pt idx="14">
-                  <c:v>04/06</c:v>
-                </c:pt>
-                <c:pt idx="15">
-                  <c:v>04/13</c:v>
-                </c:pt>
-                <c:pt idx="16">
-                  <c:v>04/20</c:v>
-                </c:pt>
-                <c:pt idx="17">
-                  <c:v>04/27</c:v>
-                </c:pt>
-                <c:pt idx="18">
-                  <c:v>05/04</c:v>
-                </c:pt>
-                <c:pt idx="19">
-                  <c:v>05/11</c:v>
-                </c:pt>
-                <c:pt idx="20">
-                  <c:v>05/18</c:v>
-                </c:pt>
-                <c:pt idx="21">
-                  <c:v>05/25</c:v>
-                </c:pt>
-                <c:pt idx="22">
-                  <c:v>06/01</c:v>
-                </c:pt>
-                <c:pt idx="23">
-                  <c:v>06/08</c:v>
-                </c:pt>
-                <c:pt idx="24">
-                  <c:v>06/15</c:v>
-                </c:pt>
-              </c:strCache>
-            </c:strRef>
-          </c:cat>
-          <c:val>
-            <c:numRef>
-              <c:f>Sheet1!$C$2:$C$26</c:f>
-              <c:numCache>
-                <c:formatCode>General</c:formatCode>
-                <c:ptCount val="25"/>
-                <c:pt idx="0">
-                  <c:v>100</c:v>
-                </c:pt>
-                <c:pt idx="1">
-                  <c:v>100</c:v>
-                </c:pt>
-                <c:pt idx="2">
-                  <c:v>100</c:v>
-                </c:pt>
-                <c:pt idx="3">
-                  <c:v>100</c:v>
-                </c:pt>
-                <c:pt idx="4">
-                  <c:v>100</c:v>
-                </c:pt>
-                <c:pt idx="5">
-                  <c:v>100</c:v>
-                </c:pt>
-                <c:pt idx="6">
-                  <c:v>100</c:v>
-                </c:pt>
-                <c:pt idx="7">
-                  <c:v>100</c:v>
-                </c:pt>
-                <c:pt idx="8">
-                  <c:v>100</c:v>
-                </c:pt>
-                <c:pt idx="9">
-                  <c:v>100</c:v>
-                </c:pt>
-                <c:pt idx="10">
-                  <c:v>100</c:v>
-                </c:pt>
-                <c:pt idx="11">
-                  <c:v>100</c:v>
-                </c:pt>
-                <c:pt idx="12">
-                  <c:v>100</c:v>
-                </c:pt>
-                <c:pt idx="13">
-                  <c:v>100</c:v>
-                </c:pt>
-                <c:pt idx="14">
-                  <c:v>100</c:v>
-                </c:pt>
-                <c:pt idx="15">
-                  <c:v>100</c:v>
-                </c:pt>
-                <c:pt idx="16">
-                  <c:v>100</c:v>
-                </c:pt>
-                <c:pt idx="17">
-                  <c:v>100</c:v>
-                </c:pt>
-                <c:pt idx="18">
-                  <c:v>100</c:v>
-                </c:pt>
-                <c:pt idx="19">
-                  <c:v>100</c:v>
-                </c:pt>
-                <c:pt idx="20">
-                  <c:v>100</c:v>
-                </c:pt>
-                <c:pt idx="21">
-                  <c:v>100</c:v>
-                </c:pt>
-                <c:pt idx="22">
-                  <c:v>100</c:v>
-                </c:pt>
-                <c:pt idx="23">
-                  <c:v>100</c:v>
-                </c:pt>
-                <c:pt idx="24">
-                  <c:v>100</c:v>
-                </c:pt>
-              </c:numCache>
-            </c:numRef>
-          </c:val>
-          <c:smooth val="0"/>
-        </c:ser>
-        <c:marker val="1"/>
-        <c:smooth val="0"/>
-        <c:axId val="2118791784"/>
-        <c:axId val="2140495176"/>
-      </c:lineChart>
-      <c:catAx>
-        <c:axId val="2118791784"/>
-        <c:scaling>
-          <c:orientation val="minMax"/>
-        </c:scaling>
-        <c:delete val="0"/>
-        <c:axPos val="b"/>
-        <c:majorTickMark val="out"/>
-        <c:minorTickMark val="none"/>
-        <c:tickLblPos val="nextTo"/>
-        <c:txPr>
-          <a:bodyPr/>
-          <a:lstStyle/>
-          <a:p>
-            <a:pPr>
-              <a:defRPr sz="600"/>
-            </a:pPr>
-          </a:p>
-        </c:txPr>
-        <c:crossAx val="2140495176"/>
-        <c:crosses val="autoZero"/>
-        <c:auto val="1"/>
-        <c:lblAlgn val="ctr"/>
-        <c:lblOffset val="100"/>
-        <c:noMultiLvlLbl val="0"/>
-      </c:catAx>
-      <c:valAx>
-        <c:axId val="2140495176"/>
-        <c:scaling>
-          <c:min val="0.0"/>
-        </c:scaling>
-        <c:delete val="0"/>
-        <c:axPos val="l"/>
-        <c:majorGridlines/>
-        <c:numFmt formatCode="0&quot;%&quot;" sourceLinked="0"/>
-        <c:majorTickMark val="out"/>
-        <c:minorTickMark val="none"/>
-        <c:tickLblPos val="nextTo"/>
-        <c:txPr>
-          <a:bodyPr/>
-          <a:lstStyle/>
-          <a:p>
-            <a:pPr>
-              <a:defRPr sz="700"/>
-            </a:pPr>
-          </a:p>
-        </c:txPr>
-        <c:crossAx val="2118791784"/>
-        <c:crosses val="autoZero"/>
-      </c:valAx>
-    </c:plotArea>
-    <c:plotVisOnly val="1"/>
-    <c:dispBlanksAs val="gap"/>
-    <c:showDLblsOverMax val="0"/>
-  </c:chart>
-  <c:txPr>
-    <a:bodyPr/>
-    <a:lstStyle/>
-    <a:p>
-      <a:pPr>
-        <a:defRPr sz="700"/>
-      </a:pPr>
-      <a:endParaRPr lang="en-US"/>
-    </a:p>
-  </c:txPr>
-  <c:externalData r:id="rId1">
-    <c:autoUpdate val="0"/>
-  </c:externalData>
-  <c:dispBlanksAs val="gap"/>
-</c:chartSpace>
-</file>
-
-<file path=ppt/charts/chart3.xml><?xml version="1.0" encoding="utf-8"?>
-<c:chartSpace xmlns:c="http://schemas.openxmlformats.org/drawingml/2006/chart" xmlns:a="http://schemas.openxmlformats.org/drawingml/2006/main" xmlns:r="http://schemas.openxmlformats.org/officeDocument/2006/relationships">
-  <c:date1904 val="0"/>
-  <c:chart>
-    <c:autoTitleDeleted val="1"/>
-    <c:plotArea>
-      <c:lineChart>
-        <c:grouping val="standard"/>
-        <c:varyColors val="0"/>
-        <c:ser>
-          <c:idx val="0"/>
-          <c:order val="0"/>
-          <c:tx>
-            <c:strRef>
-              <c:f>Sheet1!$B$1</c:f>
-              <c:strCache>
-                <c:ptCount val="1"/>
-                <c:pt idx="0">
-                  <c:v>Pelvic Block 506</c:v>
-                </c:pt>
-              </c:strCache>
-            </c:strRef>
-          </c:tx>
-          <c:spPr>
-            <a:ln w="25400">
-              <a:solidFill>
-                <a:srgbClr val="12345B"/>
-              </a:solidFill>
-            </a:ln>
-          </c:spPr>
-          <c:marker>
-            <c:symbol val="none"/>
-          </c:marker>
-          <c:cat>
-            <c:strRef>
-              <c:f>Sheet1!$A$2:$A$26</c:f>
-              <c:strCache>
-                <c:ptCount val="25"/>
-                <c:pt idx="0">
-                  <c:v>12/29</c:v>
-                </c:pt>
-                <c:pt idx="1">
-                  <c:v>01/05</c:v>
-                </c:pt>
-                <c:pt idx="2">
-                  <c:v>01/12</c:v>
-                </c:pt>
-                <c:pt idx="3">
-                  <c:v>01/19</c:v>
-                </c:pt>
-                <c:pt idx="4">
-                  <c:v>01/26</c:v>
-                </c:pt>
-                <c:pt idx="5">
-                  <c:v>02/02</c:v>
-                </c:pt>
-                <c:pt idx="6">
-                  <c:v>02/09</c:v>
-                </c:pt>
-                <c:pt idx="7">
-                  <c:v>02/16</c:v>
-                </c:pt>
-                <c:pt idx="8">
-                  <c:v>02/23</c:v>
-                </c:pt>
-                <c:pt idx="9">
-                  <c:v>03/02</c:v>
-                </c:pt>
-                <c:pt idx="10">
-                  <c:v>03/09</c:v>
-                </c:pt>
-                <c:pt idx="11">
-                  <c:v>03/16</c:v>
-                </c:pt>
-                <c:pt idx="12">
-                  <c:v>03/23</c:v>
-                </c:pt>
-                <c:pt idx="13">
-                  <c:v>03/30</c:v>
-                </c:pt>
-                <c:pt idx="14">
-                  <c:v>04/06</c:v>
-                </c:pt>
-                <c:pt idx="15">
-                  <c:v>04/13</c:v>
-                </c:pt>
-                <c:pt idx="16">
-                  <c:v>04/20</c:v>
-                </c:pt>
-                <c:pt idx="17">
-                  <c:v>04/27</c:v>
-                </c:pt>
-                <c:pt idx="18">
-                  <c:v>05/04</c:v>
-                </c:pt>
-                <c:pt idx="19">
-                  <c:v>05/11</c:v>
-                </c:pt>
-                <c:pt idx="20">
-                  <c:v>05/18</c:v>
-                </c:pt>
-                <c:pt idx="21">
-                  <c:v>05/25</c:v>
-                </c:pt>
-                <c:pt idx="22">
-                  <c:v>06/01</c:v>
-                </c:pt>
-                <c:pt idx="23">
-                  <c:v>06/08</c:v>
-                </c:pt>
-                <c:pt idx="24">
-                  <c:v>06/15</c:v>
-                </c:pt>
-              </c:strCache>
-            </c:strRef>
-          </c:cat>
-          <c:val>
-            <c:numRef>
-              <c:f>Sheet1!$B$2:$B$26</c:f>
-              <c:numCache>
-                <c:formatCode>General</c:formatCode>
-                <c:ptCount val="25"/>
-                <c:pt idx="1">
-                  <c:v>333.3</c:v>
-                </c:pt>
-                <c:pt idx="2">
-                  <c:v>13.3</c:v>
-                </c:pt>
-                <c:pt idx="3">
-                  <c:v>45.0</c:v>
-                </c:pt>
-                <c:pt idx="4">
-                  <c:v>33.3</c:v>
-                </c:pt>
-                <c:pt idx="5">
-                  <c:v>233.3</c:v>
-                </c:pt>
-                <c:pt idx="6">
-                  <c:v>38.3</c:v>
-                </c:pt>
-                <c:pt idx="7">
-                  <c:v>70.0</c:v>
-                </c:pt>
-                <c:pt idx="8">
-                  <c:v>78.3</c:v>
-                </c:pt>
-                <c:pt idx="9">
-                  <c:v>255.0</c:v>
-                </c:pt>
-                <c:pt idx="10">
-                  <c:v>40.0</c:v>
-                </c:pt>
-                <c:pt idx="11">
-                  <c:v>88.3</c:v>
-                </c:pt>
-                <c:pt idx="12">
-                  <c:v>23.3</c:v>
-                </c:pt>
-                <c:pt idx="13">
-                  <c:v>8.3</c:v>
-                </c:pt>
-                <c:pt idx="14">
-                  <c:v>41.7</c:v>
-                </c:pt>
-                <c:pt idx="15">
-                  <c:v>100.0</c:v>
-                </c:pt>
-                <c:pt idx="16">
-                  <c:v>256.7</c:v>
-                </c:pt>
-                <c:pt idx="17">
-                  <c:v>205.0</c:v>
-                </c:pt>
-                <c:pt idx="18">
-                  <c:v>198.3</c:v>
-                </c:pt>
-                <c:pt idx="19">
-                  <c:v>248.3</c:v>
-                </c:pt>
-                <c:pt idx="20">
-                  <c:v>338.3</c:v>
-                </c:pt>
-                <c:pt idx="22">
-                  <c:v>211.7</c:v>
-                </c:pt>
-                <c:pt idx="23">
-                  <c:v>28.3</c:v>
-                </c:pt>
-                <c:pt idx="24">
-                  <c:v>220.0</c:v>
-                </c:pt>
-              </c:numCache>
-            </c:numRef>
-          </c:val>
-          <c:smooth val="0"/>
-        </c:ser>
-        <c:ser>
-          <c:idx val="1"/>
-          <c:order val="1"/>
-          <c:tx>
-            <c:strRef>
-              <c:f>Sheet1!$C$1</c:f>
-              <c:strCache>
-                <c:ptCount val="1"/>
-                <c:pt idx="0">
-                  <c:v>Ask (100%)</c:v>
-                </c:pt>
-              </c:strCache>
-            </c:strRef>
-          </c:tx>
-          <c:spPr>
-            <a:ln w="15875">
-              <a:solidFill>
-                <a:srgbClr val="9AA7B4"/>
-              </a:solidFill>
-              <a:prstDash val="dash"/>
-            </a:ln>
-          </c:spPr>
-          <c:marker>
-            <c:symbol val="none"/>
-          </c:marker>
-          <c:cat>
-            <c:strRef>
-              <c:f>Sheet1!$A$2:$A$26</c:f>
-              <c:strCache>
-                <c:ptCount val="25"/>
-                <c:pt idx="0">
-                  <c:v>12/29</c:v>
-                </c:pt>
-                <c:pt idx="1">
-                  <c:v>01/05</c:v>
-                </c:pt>
-                <c:pt idx="2">
-                  <c:v>01/12</c:v>
-                </c:pt>
-                <c:pt idx="3">
-                  <c:v>01/19</c:v>
-                </c:pt>
-                <c:pt idx="4">
-                  <c:v>01/26</c:v>
-                </c:pt>
-                <c:pt idx="5">
-                  <c:v>02/02</c:v>
-                </c:pt>
-                <c:pt idx="6">
-                  <c:v>02/09</c:v>
-                </c:pt>
-                <c:pt idx="7">
-                  <c:v>02/16</c:v>
-                </c:pt>
-                <c:pt idx="8">
-                  <c:v>02/23</c:v>
-                </c:pt>
-                <c:pt idx="9">
-                  <c:v>03/02</c:v>
-                </c:pt>
-                <c:pt idx="10">
-                  <c:v>03/09</c:v>
-                </c:pt>
-                <c:pt idx="11">
-                  <c:v>03/16</c:v>
-                </c:pt>
-                <c:pt idx="12">
-                  <c:v>03/23</c:v>
-                </c:pt>
-                <c:pt idx="13">
-                  <c:v>03/30</c:v>
-                </c:pt>
-                <c:pt idx="14">
-                  <c:v>04/06</c:v>
-                </c:pt>
-                <c:pt idx="15">
-                  <c:v>04/13</c:v>
-                </c:pt>
-                <c:pt idx="16">
-                  <c:v>04/20</c:v>
-                </c:pt>
-                <c:pt idx="17">
-                  <c:v>04/27</c:v>
-                </c:pt>
-                <c:pt idx="18">
-                  <c:v>05/04</c:v>
-                </c:pt>
-                <c:pt idx="19">
-                  <c:v>05/11</c:v>
-                </c:pt>
-                <c:pt idx="20">
-                  <c:v>05/18</c:v>
-                </c:pt>
-                <c:pt idx="21">
-                  <c:v>05/25</c:v>
-                </c:pt>
-                <c:pt idx="22">
-                  <c:v>06/01</c:v>
-                </c:pt>
-                <c:pt idx="23">
-                  <c:v>06/08</c:v>
-                </c:pt>
-                <c:pt idx="24">
-                  <c:v>06/15</c:v>
-                </c:pt>
-              </c:strCache>
-            </c:strRef>
-          </c:cat>
-          <c:val>
-            <c:numRef>
-              <c:f>Sheet1!$C$2:$C$26</c:f>
-              <c:numCache>
-                <c:formatCode>General</c:formatCode>
-                <c:ptCount val="25"/>
-                <c:pt idx="0">
-                  <c:v>100</c:v>
-                </c:pt>
-                <c:pt idx="1">
-                  <c:v>100</c:v>
-                </c:pt>
-                <c:pt idx="2">
-                  <c:v>100</c:v>
-                </c:pt>
-                <c:pt idx="3">
-                  <c:v>100</c:v>
-                </c:pt>
-                <c:pt idx="4">
-                  <c:v>100</c:v>
-                </c:pt>
-                <c:pt idx="5">
-                  <c:v>100</c:v>
-                </c:pt>
-                <c:pt idx="6">
-                  <c:v>100</c:v>
-                </c:pt>
-                <c:pt idx="7">
-                  <c:v>100</c:v>
-                </c:pt>
-                <c:pt idx="8">
-                  <c:v>100</c:v>
-                </c:pt>
-                <c:pt idx="9">
-                  <c:v>100</c:v>
-                </c:pt>
-                <c:pt idx="10">
-                  <c:v>100</c:v>
-                </c:pt>
-                <c:pt idx="11">
-                  <c:v>100</c:v>
-                </c:pt>
-                <c:pt idx="12">
-                  <c:v>100</c:v>
-                </c:pt>
-                <c:pt idx="13">
-                  <c:v>100</c:v>
-                </c:pt>
-                <c:pt idx="14">
-                  <c:v>100</c:v>
-                </c:pt>
-                <c:pt idx="15">
-                  <c:v>100</c:v>
-                </c:pt>
-                <c:pt idx="16">
-                  <c:v>100</c:v>
-                </c:pt>
-                <c:pt idx="17">
-                  <c:v>100</c:v>
-                </c:pt>
-                <c:pt idx="18">
-                  <c:v>100</c:v>
-                </c:pt>
-                <c:pt idx="19">
-                  <c:v>100</c:v>
-                </c:pt>
-                <c:pt idx="20">
-                  <c:v>100</c:v>
-                </c:pt>
-                <c:pt idx="21">
-                  <c:v>100</c:v>
-                </c:pt>
-                <c:pt idx="22">
-                  <c:v>100</c:v>
-                </c:pt>
-                <c:pt idx="23">
-                  <c:v>100</c:v>
-                </c:pt>
-                <c:pt idx="24">
-                  <c:v>100</c:v>
-                </c:pt>
-              </c:numCache>
-            </c:numRef>
-          </c:val>
-          <c:smooth val="0"/>
-        </c:ser>
-        <c:marker val="1"/>
-        <c:smooth val="0"/>
-        <c:axId val="2118791784"/>
-        <c:axId val="2140495176"/>
-      </c:lineChart>
-      <c:catAx>
-        <c:axId val="2118791784"/>
-        <c:scaling>
-          <c:orientation val="minMax"/>
-        </c:scaling>
-        <c:delete val="0"/>
-        <c:axPos val="b"/>
-        <c:majorTickMark val="out"/>
-        <c:minorTickMark val="none"/>
-        <c:tickLblPos val="nextTo"/>
-        <c:txPr>
-          <a:bodyPr/>
-          <a:lstStyle/>
-          <a:p>
-            <a:pPr>
-              <a:defRPr sz="600"/>
-            </a:pPr>
-          </a:p>
-        </c:txPr>
-        <c:crossAx val="2140495176"/>
-        <c:crosses val="autoZero"/>
-        <c:auto val="1"/>
-        <c:lblAlgn val="ctr"/>
-        <c:lblOffset val="100"/>
-        <c:noMultiLvlLbl val="0"/>
-      </c:catAx>
-      <c:valAx>
-        <c:axId val="2140495176"/>
-        <c:scaling>
-          <c:min val="0.0"/>
-        </c:scaling>
-        <c:delete val="0"/>
-        <c:axPos val="l"/>
-        <c:majorGridlines/>
-        <c:numFmt formatCode="0&quot;%&quot;" sourceLinked="0"/>
-        <c:majorTickMark val="out"/>
-        <c:minorTickMark val="none"/>
-        <c:tickLblPos val="nextTo"/>
-        <c:txPr>
-          <a:bodyPr/>
-          <a:lstStyle/>
-          <a:p>
-            <a:pPr>
-              <a:defRPr sz="700"/>
-            </a:pPr>
-          </a:p>
-        </c:txPr>
-        <c:crossAx val="2118791784"/>
-        <c:crosses val="autoZero"/>
-      </c:valAx>
-    </c:plotArea>
-    <c:plotVisOnly val="1"/>
-    <c:dispBlanksAs val="gap"/>
-    <c:showDLblsOverMax val="0"/>
-  </c:chart>
-  <c:txPr>
-    <a:bodyPr/>
-    <a:lstStyle/>
-    <a:p>
-      <a:pPr>
-        <a:defRPr sz="700"/>
-      </a:pPr>
-      <a:endParaRPr lang="en-US"/>
-    </a:p>
-  </c:txPr>
-  <c:externalData r:id="rId1">
-    <c:autoUpdate val="0"/>
-  </c:externalData>
-  <c:dispBlanksAs val="gap"/>
 </c:chartSpace>
 </file>
 
@@ -6520,6 +5580,67 @@
       </p:sp>
       <p:sp>
         <p:nvSpPr>
+          <p:cNvPr id="25" name="Text 23"/>
+          <p:cNvSpPr/>
+          <p:nvPr/>
+        </p:nvSpPr>
+        <p:spPr>
+          <a:xfrm>
+            <a:off x="6355080" y="1188720"/>
+            <a:ext cx="5376672" cy="219456"/>
+          </a:xfrm>
+          <a:prstGeom prst="rect">
+            <a:avLst/>
+          </a:prstGeom>
+          <a:noFill/>
+          <a:ln/>
+        </p:spPr>
+        <p:txBody>
+          <a:bodyPr wrap="square" lIns="0" tIns="0" rIns="0" bIns="0" rtlCol="0" anchor="ctr"/>
+          <a:lstStyle/>
+          <a:p>
+            <a:pPr marL="0" indent="0">
+              <a:buNone/>
+            </a:pPr>
+            <a:r>
+              <a:rPr lang="en-US" sz="1100" b="1" kern="0" spc="60" dirty="0">
+                <a:solidFill>
+                  <a:srgbClr val="12345B"/>
+                </a:solidFill>
+                <a:latin typeface="Calibri" pitchFamily="34" charset="0"/>
+                <a:ea typeface="Calibri" pitchFamily="34" charset="-122"/>
+                <a:cs typeface="Calibri" pitchFamily="34" charset="-120"/>
+              </a:rPr>
+              <a:t>PELVIC ATTAINMENT (506+518+541) vs 250/WK STANDARD @Martin’s — WEEKLY, 2026 YTD – Harvesting Yield </a:t>
+            </a:r>
+            <a:endParaRPr lang="en-US" sz="1100" dirty="0"/>
+          </a:p>
+        </p:txBody>
+      </p:sp>
+      <p:graphicFrame>
+        <p:nvGraphicFramePr>
+          <p:cNvPr id="26" name="Chart 0"/>
+          <p:cNvGraphicFramePr/>
+          <p:nvPr>
+            <p:extLst>
+              <p:ext uri="{D42A27DB-BD31-4B8C-83A1-F6EECF244321}">
+                <p14:modId xmlns:p14="http://schemas.microsoft.com/office/powerpoint/2010/main" val="3802844109"/>
+              </p:ext>
+            </p:extLst>
+          </p:nvPr>
+        </p:nvGraphicFramePr>
+        <p:xfrm>
+          <a:off x="6281928" y="1481328"/>
+          <a:ext cx="5486400" cy="3712464"/>
+        </p:xfrm>
+        <a:graphic>
+          <a:graphicData uri="http://schemas.openxmlformats.org/drawingml/2006/chart">
+            <c:chart xmlns:c="http://schemas.openxmlformats.org/drawingml/2006/chart" xmlns:r="http://schemas.openxmlformats.org/officeDocument/2006/relationships" r:id="rId3"/>
+          </a:graphicData>
+        </a:graphic>
+      </p:graphicFrame>
+      <p:sp>
+        <p:nvSpPr>
           <p:cNvPr id="27" name="Shape 24"/>
           <p:cNvSpPr/>
           <p:nvPr/>
@@ -6581,7 +5702,7 @@
                 <a:ea typeface="Calibri" pitchFamily="34" charset="-122"/>
                 <a:cs typeface="Calibri" pitchFamily="34" charset="-120"/>
               </a:rPr>
-              <a:t>Left: each site is independent; labor &amp; freezer are shared per site, kill capacity is set by tissues that can't come from one pig.  Right: two charts — each tissue's weekly harvested ÷ its ask (Female Pelvic 541 ÷ 170, Pelvic Block 506 ÷ 60); dashed line = 100% (ask); 506 no-harvest weeks shown as gaps.  Codes are Intuitive part numbers.</a:t>
+              <a:t>Left: each site is independent; labor &amp; freezer are shared per site, kill capacity is set by tissues that can't come from one pig.  Right: attainment = (Pelvic Block 506 + SM Intact 518 + Female Pelvic 541) harvested ÷ 250/wk (weekly); Male Pelvic excluded (wound down).  Codes are Intuitive part numbers.</a:t>
             </a:r>
             <a:endParaRPr lang="en-US" sz="850" dirty="0"/>
           </a:p>
@@ -6628,110 +5749,6 @@
           </a:p>
         </p:txBody>
       </p:sp>
-      <p:sp>
-        <p:nvSpPr>
-          <p:cNvPr id="30" name="TextBox 29"/>
-          <p:cNvSpPr txBox="1"/>
-          <p:nvPr/>
-        </p:nvSpPr>
-        <p:spPr>
-          <a:xfrm>
-            <a:off x="6199632" y="1225296"/>
-            <a:ext cx="2697480" cy="310896"/>
-          </a:xfrm>
-          <a:prstGeom prst="rect">
-            <a:avLst/>
-          </a:prstGeom>
-          <a:noFill/>
-        </p:spPr>
-        <p:txBody>
-          <a:bodyPr wrap="square">
-            <a:spAutoFit/>
-          </a:bodyPr>
-          <a:lstStyle/>
-          <a:p>
-            <a:r>
-              <a:rPr sz="1000" b="1">
-                <a:solidFill>
-                  <a:srgbClr val="12345B"/>
-                </a:solidFill>
-                <a:latin typeface="Calibri"/>
-              </a:rPr>
-              <a:t>Female Pelvic (541)  ·  vs 170/wk ask</a:t>
-            </a:r>
-          </a:p>
-        </p:txBody>
-      </p:sp>
-      <p:graphicFrame>
-        <p:nvGraphicFramePr>
-          <p:cNvPr id="31" name="Chart 30"/>
-          <p:cNvGraphicFramePr>
-            <a:graphicFrameLocks noGrp="1"/>
-          </p:cNvGraphicFramePr>
-          <p:nvPr/>
-        </p:nvGraphicFramePr>
-        <p:xfrm>
-          <a:off x="6199632" y="1572768"/>
-          <a:ext cx="2697480" cy="3291840"/>
-        </p:xfrm>
-        <a:graphic>
-          <a:graphicData uri="http://schemas.openxmlformats.org/drawingml/2006/chart">
-            <c:chart xmlns:c="http://schemas.openxmlformats.org/drawingml/2006/chart" r:id="rId4"/>
-          </a:graphicData>
-        </a:graphic>
-      </p:graphicFrame>
-      <p:sp>
-        <p:nvSpPr>
-          <p:cNvPr id="32" name="TextBox 31"/>
-          <p:cNvSpPr txBox="1"/>
-          <p:nvPr/>
-        </p:nvSpPr>
-        <p:spPr>
-          <a:xfrm>
-            <a:off x="9006840" y="1225296"/>
-            <a:ext cx="2697480" cy="310896"/>
-          </a:xfrm>
-          <a:prstGeom prst="rect">
-            <a:avLst/>
-          </a:prstGeom>
-          <a:noFill/>
-        </p:spPr>
-        <p:txBody>
-          <a:bodyPr wrap="square">
-            <a:spAutoFit/>
-          </a:bodyPr>
-          <a:lstStyle/>
-          <a:p>
-            <a:r>
-              <a:rPr sz="1000" b="1">
-                <a:solidFill>
-                  <a:srgbClr val="12345B"/>
-                </a:solidFill>
-                <a:latin typeface="Calibri"/>
-              </a:rPr>
-              <a:t>Pelvic Block (506)  ·  vs 60/wk ask</a:t>
-            </a:r>
-          </a:p>
-        </p:txBody>
-      </p:sp>
-      <p:graphicFrame>
-        <p:nvGraphicFramePr>
-          <p:cNvPr id="33" name="Chart 32"/>
-          <p:cNvGraphicFramePr>
-            <a:graphicFrameLocks noGrp="1"/>
-          </p:cNvGraphicFramePr>
-          <p:nvPr/>
-        </p:nvGraphicFramePr>
-        <p:xfrm>
-          <a:off x="9006840" y="1572768"/>
-          <a:ext cx="2697480" cy="3291840"/>
-        </p:xfrm>
-        <a:graphic>
-          <a:graphicData uri="http://schemas.openxmlformats.org/drawingml/2006/chart">
-            <c:chart xmlns:c="http://schemas.openxmlformats.org/drawingml/2006/chart" r:id="rId5"/>
-          </a:graphicData>
-        </a:graphic>
-      </p:graphicFrame>
     </p:spTree>
   </p:cSld>
   <p:clrMapOvr>

--- a/tissue-capacity-model/deliverables/Tissue_Capacity_2026_2027_update063026.pptx
+++ b/tissue-capacity-model/deliverables/Tissue_Capacity_2026_2027_update063026.pptx
@@ -136,7 +136,7 @@
               <c:strCache>
                 <c:ptCount val="1"/>
                 <c:pt idx="0">
-                  <c:v>Pelvic Attainment (506+518+541)</c:v>
+                  <c:v>Pelvic Attainment (506+541)</c:v>
                 </c:pt>
               </c:strCache>
             </c:strRef>
@@ -244,79 +244,79 @@
                 <c:formatCode>General</c:formatCode>
                 <c:ptCount val="25"/>
                 <c:pt idx="0">
-                  <c:v>70</c:v>
+                  <c:v>60.3</c:v>
                 </c:pt>
                 <c:pt idx="1">
-                  <c:v>106</c:v>
+                  <c:v>91.4</c:v>
                 </c:pt>
                 <c:pt idx="2">
-                  <c:v>66.4</c:v>
+                  <c:v>57.2</c:v>
                 </c:pt>
                 <c:pt idx="3">
-                  <c:v>59.2</c:v>
+                  <c:v>51</c:v>
                 </c:pt>
                 <c:pt idx="4">
-                  <c:v>70.4</c:v>
+                  <c:v>60.7</c:v>
                 </c:pt>
                 <c:pt idx="5">
-                  <c:v>97.6</c:v>
+                  <c:v>84.1</c:v>
                 </c:pt>
                 <c:pt idx="6">
-                  <c:v>47.2</c:v>
+                  <c:v>40.7</c:v>
                 </c:pt>
                 <c:pt idx="7">
-                  <c:v>86</c:v>
+                  <c:v>74.1</c:v>
                 </c:pt>
                 <c:pt idx="8">
-                  <c:v>114.8</c:v>
+                  <c:v>99</c:v>
                 </c:pt>
                 <c:pt idx="9">
-                  <c:v>139.2</c:v>
+                  <c:v>120</c:v>
                 </c:pt>
                 <c:pt idx="10">
-                  <c:v>110</c:v>
+                  <c:v>94.8</c:v>
                 </c:pt>
                 <c:pt idx="11">
-                  <c:v>150</c:v>
+                  <c:v>129.3</c:v>
                 </c:pt>
                 <c:pt idx="12">
-                  <c:v>65.2</c:v>
+                  <c:v>56.2</c:v>
                 </c:pt>
                 <c:pt idx="13">
-                  <c:v>65.6</c:v>
+                  <c:v>56.6</c:v>
                 </c:pt>
                 <c:pt idx="14">
-                  <c:v>97.6</c:v>
+                  <c:v>84.1</c:v>
                 </c:pt>
                 <c:pt idx="15">
-                  <c:v>153.2</c:v>
+                  <c:v>132.1</c:v>
                 </c:pt>
                 <c:pt idx="16">
-                  <c:v>157.6</c:v>
+                  <c:v>135.9</c:v>
                 </c:pt>
                 <c:pt idx="17">
-                  <c:v>124.4</c:v>
+                  <c:v>107.2</c:v>
                 </c:pt>
                 <c:pt idx="18">
-                  <c:v>121.2</c:v>
+                  <c:v>104.5</c:v>
                 </c:pt>
                 <c:pt idx="19">
-                  <c:v>124.8</c:v>
+                  <c:v>107.6</c:v>
                 </c:pt>
                 <c:pt idx="20">
-                  <c:v>162</c:v>
+                  <c:v>139.7</c:v>
                 </c:pt>
                 <c:pt idx="21">
-                  <c:v>76.4</c:v>
+                  <c:v>65.9</c:v>
                 </c:pt>
                 <c:pt idx="22">
-                  <c:v>107.6</c:v>
+                  <c:v>92.8</c:v>
                 </c:pt>
                 <c:pt idx="23">
-                  <c:v>48.8</c:v>
+                  <c:v>42.1</c:v>
                 </c:pt>
                 <c:pt idx="24">
-                  <c:v>96.8</c:v>
+                  <c:v>83.4</c:v>
                 </c:pt>
               </c:numCache>
             </c:numRef>
@@ -5611,7 +5611,7 @@
                 <a:ea typeface="Calibri" pitchFamily="34" charset="-122"/>
                 <a:cs typeface="Calibri" pitchFamily="34" charset="-120"/>
               </a:rPr>
-              <a:t>PELVIC ATTAINMENT (506+518+541) vs 250/WK STANDARD @Martin’s — WEEKLY, 2026 YTD – Harvesting Yield </a:t>
+              <a:t>PELVIC ATTAINMENT (506+541) vs 290/WK STANDARD @Martin’s — WEEKLY, 2026 YTD – Harvesting Yield </a:t>
             </a:r>
             <a:endParaRPr lang="en-US" sz="1100" dirty="0"/>
           </a:p>
@@ -5702,7 +5702,7 @@
                 <a:ea typeface="Calibri" pitchFamily="34" charset="-122"/>
                 <a:cs typeface="Calibri" pitchFamily="34" charset="-120"/>
               </a:rPr>
-              <a:t>Left: each site is independent; labor &amp; freezer are shared per site, kill capacity is set by tissues that can't come from one pig.  Right: attainment = (Pelvic Block 506 + SM Intact 518 + Female Pelvic 541) harvested ÷ 250/wk (weekly); Male Pelvic excluded (wound down).  Codes are Intuitive part numbers.</a:t>
+              <a:t>Left: each site is independent; labor &amp; freezer are shared per site, kill capacity is set by tissues that can't come from one pig.  Right: attainment = (Pelvic Block 506 + Female Pelvic 541) harvested ÷ 290/wk (weekly); 290 = 125% of 2027 Martins pelvic demand; Male Pelvic excluded (wound down).  Codes are Intuitive part numbers.</a:t>
             </a:r>
             <a:endParaRPr lang="en-US" sz="850" dirty="0"/>
           </a:p>

--- a/tissue-capacity-model/deliverables/Tissue_Capacity_2026_2027_update063026.pptx
+++ b/tissue-capacity-model/deliverables/Tissue_Capacity_2026_2027_update063026.pptx
@@ -112,573 +112,6 @@
     </p:ext>
   </p:extLst>
 </p:presentation>
-</file>
-
-<file path=ppt/charts/chart1.xml><?xml version="1.0" encoding="utf-8"?>
-<c:chartSpace xmlns:c="http://schemas.openxmlformats.org/drawingml/2006/chart" xmlns:a="http://schemas.openxmlformats.org/drawingml/2006/main" xmlns:r="http://schemas.openxmlformats.org/officeDocument/2006/relationships" xmlns:c16r2="http://schemas.microsoft.com/office/drawing/2015/06/chart">
-  <c:date1904 val="0"/>
-  <c:lang val="en-US"/>
-  <c:roundedCorners val="1"/>
-  <c:style val="2"/>
-  <c:chart>
-    <c:autoTitleDeleted val="1"/>
-    <c:plotArea>
-      <c:layout/>
-      <c:lineChart>
-        <c:grouping val="standard"/>
-        <c:varyColors val="0"/>
-        <c:ser>
-          <c:idx val="0"/>
-          <c:order val="0"/>
-          <c:tx>
-            <c:strRef>
-              <c:f>Sheet1!$B$1</c:f>
-              <c:strCache>
-                <c:ptCount val="1"/>
-                <c:pt idx="0">
-                  <c:v>Pelvic Attainment (506+541)</c:v>
-                </c:pt>
-              </c:strCache>
-            </c:strRef>
-          </c:tx>
-          <c:spPr>
-            <a:ln w="31750" cap="flat">
-              <a:solidFill>
-                <a:srgbClr val="C0392B"/>
-              </a:solidFill>
-              <a:prstDash val="solid"/>
-              <a:round/>
-            </a:ln>
-            <a:effectLst/>
-          </c:spPr>
-          <c:marker>
-            <c:symbol val="none"/>
-          </c:marker>
-          <c:cat>
-            <c:strRef>
-              <c:f>Sheet1!$A$2:$A$26</c:f>
-              <c:strCache>
-                <c:ptCount val="25"/>
-                <c:pt idx="0">
-                  <c:v>12/29</c:v>
-                </c:pt>
-                <c:pt idx="1">
-                  <c:v>01/05</c:v>
-                </c:pt>
-                <c:pt idx="2">
-                  <c:v>01/12</c:v>
-                </c:pt>
-                <c:pt idx="3">
-                  <c:v>01/19</c:v>
-                </c:pt>
-                <c:pt idx="4">
-                  <c:v>01/26</c:v>
-                </c:pt>
-                <c:pt idx="5">
-                  <c:v>02/02</c:v>
-                </c:pt>
-                <c:pt idx="6">
-                  <c:v>02/09</c:v>
-                </c:pt>
-                <c:pt idx="7">
-                  <c:v>02/16</c:v>
-                </c:pt>
-                <c:pt idx="8">
-                  <c:v>02/23</c:v>
-                </c:pt>
-                <c:pt idx="9">
-                  <c:v>03/02</c:v>
-                </c:pt>
-                <c:pt idx="10">
-                  <c:v>03/09</c:v>
-                </c:pt>
-                <c:pt idx="11">
-                  <c:v>03/16</c:v>
-                </c:pt>
-                <c:pt idx="12">
-                  <c:v>03/23</c:v>
-                </c:pt>
-                <c:pt idx="13">
-                  <c:v>03/30</c:v>
-                </c:pt>
-                <c:pt idx="14">
-                  <c:v>04/06</c:v>
-                </c:pt>
-                <c:pt idx="15">
-                  <c:v>04/13</c:v>
-                </c:pt>
-                <c:pt idx="16">
-                  <c:v>04/20</c:v>
-                </c:pt>
-                <c:pt idx="17">
-                  <c:v>04/27</c:v>
-                </c:pt>
-                <c:pt idx="18">
-                  <c:v>05/04</c:v>
-                </c:pt>
-                <c:pt idx="19">
-                  <c:v>05/11</c:v>
-                </c:pt>
-                <c:pt idx="20">
-                  <c:v>05/18</c:v>
-                </c:pt>
-                <c:pt idx="21">
-                  <c:v>05/25</c:v>
-                </c:pt>
-                <c:pt idx="22">
-                  <c:v>06/01</c:v>
-                </c:pt>
-                <c:pt idx="23">
-                  <c:v>06/08</c:v>
-                </c:pt>
-                <c:pt idx="24">
-                  <c:v>06/15</c:v>
-                </c:pt>
-              </c:strCache>
-            </c:strRef>
-          </c:cat>
-          <c:val>
-            <c:numRef>
-              <c:f>Sheet1!$B$2:$B$26</c:f>
-              <c:numCache>
-                <c:formatCode>General</c:formatCode>
-                <c:ptCount val="25"/>
-                <c:pt idx="0">
-                  <c:v>60.3</c:v>
-                </c:pt>
-                <c:pt idx="1">
-                  <c:v>91.4</c:v>
-                </c:pt>
-                <c:pt idx="2">
-                  <c:v>57.2</c:v>
-                </c:pt>
-                <c:pt idx="3">
-                  <c:v>51</c:v>
-                </c:pt>
-                <c:pt idx="4">
-                  <c:v>60.7</c:v>
-                </c:pt>
-                <c:pt idx="5">
-                  <c:v>84.1</c:v>
-                </c:pt>
-                <c:pt idx="6">
-                  <c:v>40.7</c:v>
-                </c:pt>
-                <c:pt idx="7">
-                  <c:v>74.1</c:v>
-                </c:pt>
-                <c:pt idx="8">
-                  <c:v>99</c:v>
-                </c:pt>
-                <c:pt idx="9">
-                  <c:v>120</c:v>
-                </c:pt>
-                <c:pt idx="10">
-                  <c:v>94.8</c:v>
-                </c:pt>
-                <c:pt idx="11">
-                  <c:v>129.3</c:v>
-                </c:pt>
-                <c:pt idx="12">
-                  <c:v>56.2</c:v>
-                </c:pt>
-                <c:pt idx="13">
-                  <c:v>56.6</c:v>
-                </c:pt>
-                <c:pt idx="14">
-                  <c:v>84.1</c:v>
-                </c:pt>
-                <c:pt idx="15">
-                  <c:v>132.1</c:v>
-                </c:pt>
-                <c:pt idx="16">
-                  <c:v>135.9</c:v>
-                </c:pt>
-                <c:pt idx="17">
-                  <c:v>107.2</c:v>
-                </c:pt>
-                <c:pt idx="18">
-                  <c:v>104.5</c:v>
-                </c:pt>
-                <c:pt idx="19">
-                  <c:v>107.6</c:v>
-                </c:pt>
-                <c:pt idx="20">
-                  <c:v>139.7</c:v>
-                </c:pt>
-                <c:pt idx="21">
-                  <c:v>65.9</c:v>
-                </c:pt>
-                <c:pt idx="22">
-                  <c:v>92.8</c:v>
-                </c:pt>
-                <c:pt idx="23">
-                  <c:v>42.1</c:v>
-                </c:pt>
-                <c:pt idx="24">
-                  <c:v>83.4</c:v>
-                </c:pt>
-              </c:numCache>
-            </c:numRef>
-          </c:val>
-          <c:smooth val="0"/>
-          <c:extLst>
-            <c:ext xmlns:c16="http://schemas.microsoft.com/office/drawing/2014/chart" uri="{C3380CC4-5D6E-409C-BE32-E72D297353CC}">
-              <c16:uniqueId val="{00000000-AB4F-47DF-96E3-C4C373BE84C4}"/>
-            </c:ext>
-          </c:extLst>
-        </c:ser>
-        <c:ser>
-          <c:idx val="1"/>
-          <c:order val="1"/>
-          <c:tx>
-            <c:strRef>
-              <c:f>Sheet1!$D$1</c:f>
-              <c:strCache>
-                <c:ptCount val="1"/>
-                <c:pt idx="0">
-                  <c:v>Ask (100%)</c:v>
-                </c:pt>
-              </c:strCache>
-            </c:strRef>
-          </c:tx>
-          <c:spPr>
-            <a:ln w="31750" cap="flat">
-              <a:solidFill>
-                <a:srgbClr val="B7C1CB"/>
-              </a:solidFill>
-              <a:prstDash val="solid"/>
-              <a:round/>
-            </a:ln>
-            <a:effectLst/>
-          </c:spPr>
-          <c:marker>
-            <c:symbol val="none"/>
-          </c:marker>
-          <c:cat>
-            <c:strRef>
-              <c:f>Sheet1!$A$2:$A$26</c:f>
-              <c:strCache>
-                <c:ptCount val="25"/>
-                <c:pt idx="0">
-                  <c:v>12/29</c:v>
-                </c:pt>
-                <c:pt idx="1">
-                  <c:v>01/05</c:v>
-                </c:pt>
-                <c:pt idx="2">
-                  <c:v>01/12</c:v>
-                </c:pt>
-                <c:pt idx="3">
-                  <c:v>01/19</c:v>
-                </c:pt>
-                <c:pt idx="4">
-                  <c:v>01/26</c:v>
-                </c:pt>
-                <c:pt idx="5">
-                  <c:v>02/02</c:v>
-                </c:pt>
-                <c:pt idx="6">
-                  <c:v>02/09</c:v>
-                </c:pt>
-                <c:pt idx="7">
-                  <c:v>02/16</c:v>
-                </c:pt>
-                <c:pt idx="8">
-                  <c:v>02/23</c:v>
-                </c:pt>
-                <c:pt idx="9">
-                  <c:v>03/02</c:v>
-                </c:pt>
-                <c:pt idx="10">
-                  <c:v>03/09</c:v>
-                </c:pt>
-                <c:pt idx="11">
-                  <c:v>03/16</c:v>
-                </c:pt>
-                <c:pt idx="12">
-                  <c:v>03/23</c:v>
-                </c:pt>
-                <c:pt idx="13">
-                  <c:v>03/30</c:v>
-                </c:pt>
-                <c:pt idx="14">
-                  <c:v>04/06</c:v>
-                </c:pt>
-                <c:pt idx="15">
-                  <c:v>04/13</c:v>
-                </c:pt>
-                <c:pt idx="16">
-                  <c:v>04/20</c:v>
-                </c:pt>
-                <c:pt idx="17">
-                  <c:v>04/27</c:v>
-                </c:pt>
-                <c:pt idx="18">
-                  <c:v>05/04</c:v>
-                </c:pt>
-                <c:pt idx="19">
-                  <c:v>05/11</c:v>
-                </c:pt>
-                <c:pt idx="20">
-                  <c:v>05/18</c:v>
-                </c:pt>
-                <c:pt idx="21">
-                  <c:v>05/25</c:v>
-                </c:pt>
-                <c:pt idx="22">
-                  <c:v>06/01</c:v>
-                </c:pt>
-                <c:pt idx="23">
-                  <c:v>06/08</c:v>
-                </c:pt>
-                <c:pt idx="24">
-                  <c:v>06/15</c:v>
-                </c:pt>
-              </c:strCache>
-            </c:strRef>
-          </c:cat>
-          <c:val>
-            <c:numRef>
-              <c:f>Sheet1!$D$2:$D$26</c:f>
-              <c:numCache>
-                <c:formatCode>General</c:formatCode>
-                <c:ptCount val="25"/>
-                <c:pt idx="0">
-                  <c:v>100</c:v>
-                </c:pt>
-                <c:pt idx="1">
-                  <c:v>100</c:v>
-                </c:pt>
-                <c:pt idx="2">
-                  <c:v>100</c:v>
-                </c:pt>
-                <c:pt idx="3">
-                  <c:v>100</c:v>
-                </c:pt>
-                <c:pt idx="4">
-                  <c:v>100</c:v>
-                </c:pt>
-                <c:pt idx="5">
-                  <c:v>100</c:v>
-                </c:pt>
-                <c:pt idx="6">
-                  <c:v>100</c:v>
-                </c:pt>
-                <c:pt idx="7">
-                  <c:v>100</c:v>
-                </c:pt>
-                <c:pt idx="8">
-                  <c:v>100</c:v>
-                </c:pt>
-                <c:pt idx="9">
-                  <c:v>100</c:v>
-                </c:pt>
-                <c:pt idx="10">
-                  <c:v>100</c:v>
-                </c:pt>
-                <c:pt idx="11">
-                  <c:v>100</c:v>
-                </c:pt>
-                <c:pt idx="12">
-                  <c:v>100</c:v>
-                </c:pt>
-                <c:pt idx="13">
-                  <c:v>100</c:v>
-                </c:pt>
-                <c:pt idx="14">
-                  <c:v>100</c:v>
-                </c:pt>
-                <c:pt idx="15">
-                  <c:v>100</c:v>
-                </c:pt>
-                <c:pt idx="16">
-                  <c:v>100</c:v>
-                </c:pt>
-                <c:pt idx="17">
-                  <c:v>100</c:v>
-                </c:pt>
-                <c:pt idx="18">
-                  <c:v>100</c:v>
-                </c:pt>
-                <c:pt idx="19">
-                  <c:v>100</c:v>
-                </c:pt>
-                <c:pt idx="20">
-                  <c:v>100</c:v>
-                </c:pt>
-                <c:pt idx="21">
-                  <c:v>100</c:v>
-                </c:pt>
-                <c:pt idx="22">
-                  <c:v>100</c:v>
-                </c:pt>
-                <c:pt idx="23">
-                  <c:v>100</c:v>
-                </c:pt>
-                <c:pt idx="24">
-                  <c:v>100</c:v>
-                </c:pt>
-              </c:numCache>
-            </c:numRef>
-          </c:val>
-          <c:smooth val="0"/>
-          <c:extLst>
-            <c:ext xmlns:c16="http://schemas.microsoft.com/office/drawing/2014/chart" uri="{C3380CC4-5D6E-409C-BE32-E72D297353CC}">
-              <c16:uniqueId val="{00000002-AB4F-47DF-96E3-C4C373BE84C4}"/>
-            </c:ext>
-          </c:extLst>
-        </c:ser>
-        <c:dLbls>
-          <c:showLegendKey val="0"/>
-          <c:showVal val="0"/>
-          <c:showCatName val="0"/>
-          <c:showSerName val="0"/>
-          <c:showPercent val="0"/>
-          <c:showBubbleSize val="0"/>
-        </c:dLbls>
-        <c:smooth val="0"/>
-        <c:axId val="2094734554"/>
-        <c:axId val="2094734552"/>
-      </c:lineChart>
-      <c:catAx>
-        <c:axId val="2094734554"/>
-        <c:scaling>
-          <c:orientation val="minMax"/>
-        </c:scaling>
-        <c:delete val="0"/>
-        <c:axPos val="b"/>
-        <c:numFmt formatCode="General" sourceLinked="1"/>
-        <c:majorTickMark val="out"/>
-        <c:minorTickMark val="none"/>
-        <c:tickLblPos val="low"/>
-        <c:spPr>
-          <a:ln w="12700" cap="flat">
-            <a:solidFill>
-              <a:srgbClr val="888888"/>
-            </a:solidFill>
-            <a:prstDash val="solid"/>
-            <a:round/>
-          </a:ln>
-        </c:spPr>
-        <c:txPr>
-          <a:bodyPr/>
-          <a:lstStyle/>
-          <a:p>
-            <a:pPr>
-              <a:defRPr sz="750" b="0" i="0" u="none" strike="noStrike">
-                <a:solidFill>
-                  <a:srgbClr val="64748B"/>
-                </a:solidFill>
-                <a:latin typeface="Arial"/>
-              </a:defRPr>
-            </a:pPr>
-            <a:endParaRPr lang="en-US"/>
-          </a:p>
-        </c:txPr>
-        <c:crossAx val="2094734552"/>
-        <c:crosses val="autoZero"/>
-        <c:auto val="1"/>
-        <c:lblAlgn val="ctr"/>
-        <c:lblOffset val="100"/>
-        <c:noMultiLvlLbl val="1"/>
-      </c:catAx>
-      <c:valAx>
-        <c:axId val="2094734552"/>
-        <c:scaling>
-          <c:orientation val="minMax"/>
-          <c:max val="120"/>
-          <c:min val="0"/>
-        </c:scaling>
-        <c:delete val="0"/>
-        <c:axPos val="l"/>
-        <c:majorGridlines>
-          <c:spPr>
-            <a:ln w="6350" cap="flat">
-              <a:solidFill>
-                <a:srgbClr val="E8EDF2"/>
-              </a:solidFill>
-              <a:prstDash val="solid"/>
-              <a:round/>
-            </a:ln>
-          </c:spPr>
-        </c:majorGridlines>
-        <c:numFmt formatCode="0&quot;%&quot;" sourceLinked="0"/>
-        <c:majorTickMark val="out"/>
-        <c:minorTickMark val="none"/>
-        <c:tickLblPos val="nextTo"/>
-        <c:spPr>
-          <a:ln w="12700" cap="flat">
-            <a:solidFill>
-              <a:srgbClr val="888888"/>
-            </a:solidFill>
-            <a:prstDash val="solid"/>
-            <a:round/>
-          </a:ln>
-        </c:spPr>
-        <c:txPr>
-          <a:bodyPr/>
-          <a:lstStyle/>
-          <a:p>
-            <a:pPr>
-              <a:defRPr sz="800" b="0" i="0" u="none" strike="noStrike">
-                <a:solidFill>
-                  <a:srgbClr val="64748B"/>
-                </a:solidFill>
-                <a:latin typeface="Arial"/>
-              </a:defRPr>
-            </a:pPr>
-            <a:endParaRPr lang="en-US"/>
-          </a:p>
-        </c:txPr>
-        <c:crossAx val="2094734554"/>
-        <c:crosses val="autoZero"/>
-        <c:crossBetween val="between"/>
-        <c:majorUnit val="20"/>
-      </c:valAx>
-      <c:spPr>
-        <a:noFill/>
-        <a:ln>
-          <a:noFill/>
-        </a:ln>
-        <a:effectLst/>
-      </c:spPr>
-    </c:plotArea>
-    <c:legend>
-      <c:legendPos val="b"/>
-      <c:overlay val="0"/>
-      <c:txPr>
-        <a:bodyPr/>
-        <a:lstStyle/>
-        <a:p>
-          <a:pPr>
-            <a:defRPr sz="900">
-              <a:solidFill>
-                <a:srgbClr val="20303D"/>
-              </a:solidFill>
-            </a:defRPr>
-          </a:pPr>
-          <a:endParaRPr lang="en-US"/>
-        </a:p>
-      </c:txPr>
-    </c:legend>
-    <c:plotVisOnly val="1"/>
-    <c:dispBlanksAs val="span"/>
-    <c:showDLblsOverMax val="1"/>
-  </c:chart>
-  <c:spPr>
-    <a:solidFill>
-      <a:srgbClr val="FFFFFF"/>
-    </a:solidFill>
-    <a:ln>
-      <a:noFill/>
-    </a:ln>
-    <a:effectLst/>
-  </c:spPr>
-  <c:externalData r:id="rId1">
-    <c:autoUpdate val="0"/>
-  </c:externalData>
-</c:chartSpace>
 </file>
 
 <file path=ppt/notesMasters/notesMaster1.xml><?xml version="1.0" encoding="utf-8"?>
@@ -1580,43 +1013,7 @@
                 </a:solidFill>
                 <a:latin typeface="Calibri"/>
               </a:rPr>
-              <a:t>   ▸ The labor reallocation lifted Martins to 1.14× — now freezer-/labor-bound. Pelvic-yield gains free pigs &amp; labor but don't move freezer, so Martins stays ~1.14× until freezer is addressed too — see slide 3.</a:t>
-            </a:r>
-            <a:r>
-              <a:rPr sz="1100" b="1" i="1" dirty="0" err="1">
-                <a:solidFill>
-                  <a:srgbClr val="12345B"/>
-                </a:solidFill>
-                <a:latin typeface="Calibri"/>
-              </a:rPr>
-              <a:t/>
-            </a:r>
-            <a:r>
-              <a:rPr sz="1100" b="1" i="1" dirty="0">
-                <a:solidFill>
-                  <a:srgbClr val="12345B"/>
-                </a:solidFill>
-                <a:latin typeface="Calibri"/>
-              </a:rPr>
-              <a:t/>
-            </a:r>
-            <a:r>
-              <a:rPr sz="1100" b="1" i="1" dirty="0" err="1">
-                <a:solidFill>
-                  <a:srgbClr val="12345B"/>
-                </a:solidFill>
-                <a:latin typeface="Calibri"/>
-              </a:rPr>
-              <a:t/>
-            </a:r>
-            <a:r>
-              <a:rPr sz="1100" b="1" i="1" dirty="0">
-                <a:solidFill>
-                  <a:srgbClr val="12345B"/>
-                </a:solidFill>
-                <a:latin typeface="Calibri"/>
-              </a:rPr>
-              <a:t/>
+              <a:t>   </a:t>
             </a:r>
             <a:endParaRPr lang="en-US" sz="1450" dirty="0"/>
           </a:p>
@@ -4789,7 +4186,7 @@
         <p:spPr>
           <a:xfrm>
             <a:off x="457200" y="1225296"/>
-            <a:ext cx="5623560" cy="960120"/>
+            <a:ext cx="11274552" cy="960120"/>
           </a:xfrm>
           <a:prstGeom prst="roundRect">
             <a:avLst>
@@ -4868,8 +4265,8 @@
         </p:nvSpPr>
         <p:spPr>
           <a:xfrm>
-            <a:off x="2286000" y="1344168"/>
-            <a:ext cx="2286000" cy="274320"/>
+            <a:off x="8503920" y="1344168"/>
+            <a:ext cx="3108960" cy="274320"/>
           </a:xfrm>
           <a:prstGeom prst="roundRect">
             <a:avLst>
@@ -4897,8 +4294,8 @@
         </p:nvSpPr>
         <p:spPr>
           <a:xfrm>
-            <a:off x="2286000" y="1339596"/>
-            <a:ext cx="2286000" cy="283464"/>
+            <a:off x="8503920" y="1339596"/>
+            <a:ext cx="3108960" cy="283464"/>
           </a:xfrm>
           <a:prstGeom prst="rect">
             <a:avLst/>
@@ -4937,7 +4334,7 @@
         <p:spPr>
           <a:xfrm>
             <a:off x="658368" y="1673352"/>
-            <a:ext cx="5257800" cy="457200"/>
+            <a:ext cx="10607040" cy="457200"/>
           </a:xfrm>
           <a:prstGeom prst="rect">
             <a:avLst/>
@@ -4976,7 +4373,7 @@
         <p:spPr>
           <a:xfrm>
             <a:off x="457200" y="2240280"/>
-            <a:ext cx="5623560" cy="960120"/>
+            <a:ext cx="11274552" cy="960120"/>
           </a:xfrm>
           <a:prstGeom prst="roundRect">
             <a:avLst>
@@ -5055,8 +4452,8 @@
         </p:nvSpPr>
         <p:spPr>
           <a:xfrm>
-            <a:off x="2286000" y="2359152"/>
-            <a:ext cx="2286000" cy="274320"/>
+            <a:off x="8503920" y="2359152"/>
+            <a:ext cx="3108960" cy="274320"/>
           </a:xfrm>
           <a:prstGeom prst="roundRect">
             <a:avLst>
@@ -5084,8 +4481,8 @@
         </p:nvSpPr>
         <p:spPr>
           <a:xfrm>
-            <a:off x="2286000" y="2354580"/>
-            <a:ext cx="2286000" cy="283464"/>
+            <a:off x="8503920" y="2354580"/>
+            <a:ext cx="3108960" cy="283464"/>
           </a:xfrm>
           <a:prstGeom prst="rect">
             <a:avLst/>
@@ -5124,7 +4521,7 @@
         <p:spPr>
           <a:xfrm>
             <a:off x="658368" y="2688336"/>
-            <a:ext cx="5257800" cy="457200"/>
+            <a:ext cx="10607040" cy="457200"/>
           </a:xfrm>
           <a:prstGeom prst="rect">
             <a:avLst/>
@@ -5163,7 +4560,7 @@
         <p:spPr>
           <a:xfrm>
             <a:off x="457200" y="3255264"/>
-            <a:ext cx="5623560" cy="960120"/>
+            <a:ext cx="11274552" cy="960120"/>
           </a:xfrm>
           <a:prstGeom prst="roundRect">
             <a:avLst>
@@ -5242,8 +4639,8 @@
         </p:nvSpPr>
         <p:spPr>
           <a:xfrm>
-            <a:off x="2286000" y="3374136"/>
-            <a:ext cx="2286000" cy="274320"/>
+            <a:off x="8503920" y="3374136"/>
+            <a:ext cx="3108960" cy="274320"/>
           </a:xfrm>
           <a:prstGeom prst="roundRect">
             <a:avLst>
@@ -5271,8 +4668,8 @@
         </p:nvSpPr>
         <p:spPr>
           <a:xfrm>
-            <a:off x="2286000" y="3369564"/>
-            <a:ext cx="2286000" cy="283464"/>
+            <a:off x="8503920" y="3369564"/>
+            <a:ext cx="3108960" cy="283464"/>
           </a:xfrm>
           <a:prstGeom prst="rect">
             <a:avLst/>
@@ -5311,7 +4708,7 @@
         <p:spPr>
           <a:xfrm>
             <a:off x="658368" y="3703320"/>
-            <a:ext cx="5257800" cy="457200"/>
+            <a:ext cx="10607040" cy="457200"/>
           </a:xfrm>
           <a:prstGeom prst="rect">
             <a:avLst/>
@@ -5350,7 +4747,7 @@
         <p:spPr>
           <a:xfrm>
             <a:off x="457200" y="4270248"/>
-            <a:ext cx="5623560" cy="960120"/>
+            <a:ext cx="11274552" cy="960120"/>
           </a:xfrm>
           <a:prstGeom prst="roundRect">
             <a:avLst>
@@ -5429,8 +4826,8 @@
         </p:nvSpPr>
         <p:spPr>
           <a:xfrm>
-            <a:off x="2286000" y="4389120"/>
-            <a:ext cx="2286000" cy="274320"/>
+            <a:off x="8503920" y="4389120"/>
+            <a:ext cx="3108960" cy="274320"/>
           </a:xfrm>
           <a:prstGeom prst="roundRect">
             <a:avLst>
@@ -5458,8 +4855,8 @@
         </p:nvSpPr>
         <p:spPr>
           <a:xfrm>
-            <a:off x="2286000" y="4384548"/>
-            <a:ext cx="2286000" cy="283464"/>
+            <a:off x="8503920" y="4384548"/>
+            <a:ext cx="3108960" cy="283464"/>
           </a:xfrm>
           <a:prstGeom prst="rect">
             <a:avLst/>
@@ -5498,7 +4895,7 @@
         <p:spPr>
           <a:xfrm>
             <a:off x="658368" y="4718304"/>
-            <a:ext cx="5257800" cy="219456"/>
+            <a:ext cx="10607040" cy="219456"/>
           </a:xfrm>
           <a:prstGeom prst="rect">
             <a:avLst/>
@@ -5537,7 +4934,7 @@
         <p:spPr>
           <a:xfrm>
             <a:off x="658368" y="4937760"/>
-            <a:ext cx="5257800" cy="237744"/>
+            <a:ext cx="10607040" cy="237744"/>
           </a:xfrm>
           <a:prstGeom prst="rect">
             <a:avLst/>
@@ -5578,67 +4975,6 @@
           </a:p>
         </p:txBody>
       </p:sp>
-      <p:sp>
-        <p:nvSpPr>
-          <p:cNvPr id="25" name="Text 23"/>
-          <p:cNvSpPr/>
-          <p:nvPr/>
-        </p:nvSpPr>
-        <p:spPr>
-          <a:xfrm>
-            <a:off x="6355080" y="1188720"/>
-            <a:ext cx="5376672" cy="219456"/>
-          </a:xfrm>
-          <a:prstGeom prst="rect">
-            <a:avLst/>
-          </a:prstGeom>
-          <a:noFill/>
-          <a:ln/>
-        </p:spPr>
-        <p:txBody>
-          <a:bodyPr wrap="square" lIns="0" tIns="0" rIns="0" bIns="0" rtlCol="0" anchor="ctr"/>
-          <a:lstStyle/>
-          <a:p>
-            <a:pPr marL="0" indent="0">
-              <a:buNone/>
-            </a:pPr>
-            <a:r>
-              <a:rPr lang="en-US" sz="1100" b="1" kern="0" spc="60" dirty="0">
-                <a:solidFill>
-                  <a:srgbClr val="12345B"/>
-                </a:solidFill>
-                <a:latin typeface="Calibri" pitchFamily="34" charset="0"/>
-                <a:ea typeface="Calibri" pitchFamily="34" charset="-122"/>
-                <a:cs typeface="Calibri" pitchFamily="34" charset="-120"/>
-              </a:rPr>
-              <a:t>PELVIC ATTAINMENT (506+541) vs 290/WK STANDARD @Martin’s — WEEKLY, 2026 YTD – Harvesting Yield </a:t>
-            </a:r>
-            <a:endParaRPr lang="en-US" sz="1100" dirty="0"/>
-          </a:p>
-        </p:txBody>
-      </p:sp>
-      <p:graphicFrame>
-        <p:nvGraphicFramePr>
-          <p:cNvPr id="26" name="Chart 0"/>
-          <p:cNvGraphicFramePr/>
-          <p:nvPr>
-            <p:extLst>
-              <p:ext uri="{D42A27DB-BD31-4B8C-83A1-F6EECF244321}">
-                <p14:modId xmlns:p14="http://schemas.microsoft.com/office/powerpoint/2010/main" val="3802844109"/>
-              </p:ext>
-            </p:extLst>
-          </p:nvPr>
-        </p:nvGraphicFramePr>
-        <p:xfrm>
-          <a:off x="6281928" y="1481328"/>
-          <a:ext cx="5486400" cy="3712464"/>
-        </p:xfrm>
-        <a:graphic>
-          <a:graphicData uri="http://schemas.openxmlformats.org/drawingml/2006/chart">
-            <c:chart xmlns:c="http://schemas.openxmlformats.org/drawingml/2006/chart" xmlns:r="http://schemas.openxmlformats.org/officeDocument/2006/relationships" r:id="rId3"/>
-          </a:graphicData>
-        </a:graphic>
-      </p:graphicFrame>
       <p:sp>
         <p:nvSpPr>
           <p:cNvPr id="27" name="Shape 24"/>
@@ -5702,50 +5038,9 @@
                 <a:ea typeface="Calibri" pitchFamily="34" charset="-122"/>
                 <a:cs typeface="Calibri" pitchFamily="34" charset="-120"/>
               </a:rPr>
-              <a:t>Left: each site is independent; labor &amp; freezer are shared per site, kill capacity is set by tissues that can't come from one pig.  Right: attainment = (Pelvic Block 506 + Female Pelvic 541) harvested ÷ 290/wk (weekly); 290 = 125% of 2027 Martins pelvic demand; Male Pelvic excluded (wound down).  Codes are Intuitive part numbers.</a:t>
+              <a:t>Each site is independent; labor &amp; freezer are shared per site, while kill capacity is set by tissues that can't come from one pig.  Codes are Intuitive part numbers.</a:t>
             </a:r>
             <a:endParaRPr lang="en-US" sz="850" dirty="0"/>
-          </a:p>
-        </p:txBody>
-      </p:sp>
-      <p:sp>
-        <p:nvSpPr>
-          <p:cNvPr id="29" name="TextBox 28">
-            <a:extLst>
-              <a:ext uri="{FF2B5EF4-FFF2-40B4-BE49-F238E27FC236}">
-                <a16:creationId xmlns:a16="http://schemas.microsoft.com/office/drawing/2014/main" id="{8A7D2B7E-C16B-22F9-D6E8-0AEDF44B6CC5}"/>
-              </a:ext>
-            </a:extLst>
-          </p:cNvPr>
-          <p:cNvSpPr txBox="1"/>
-          <p:nvPr/>
-        </p:nvSpPr>
-        <p:spPr>
-          <a:xfrm>
-            <a:off x="3268980" y="6071616"/>
-            <a:ext cx="8181599" cy="646331"/>
-          </a:xfrm>
-          <a:prstGeom prst="rect">
-            <a:avLst/>
-          </a:prstGeom>
-          <a:noFill/>
-        </p:spPr>
-        <p:txBody>
-          <a:bodyPr wrap="none" rtlCol="0">
-            <a:spAutoFit/>
-          </a:bodyPr>
-          <a:lstStyle/>
-          <a:p>
-            <a:r>
-              <a:rPr lang="en-US" dirty="0"/>
-              <a:t>✓ 250 denominator applied</a:t>
-            </a:r>
-          </a:p>
-          <a:p>
-            <a:r>
-              <a:rPr lang="en-US" dirty="0"/>
-              <a:t>Why is the attainment dropping? Possible culprits: Seasonality, harvesting yield, labor</a:t>
-            </a:r>
           </a:p>
         </p:txBody>
       </p:sp>
